--- a/その他/ゲーム展示会/学生ゲーム展示会について.pptx
+++ b/その他/ゲーム展示会/学生ゲーム展示会について.pptx
@@ -7,13 +7,15 @@
   <p:sldIdLst>
     <p:sldId id="256" r:id="rId2"/>
     <p:sldId id="263" r:id="rId3"/>
-    <p:sldId id="257" r:id="rId4"/>
-    <p:sldId id="258" r:id="rId5"/>
+    <p:sldId id="265" r:id="rId4"/>
+    <p:sldId id="257" r:id="rId5"/>
     <p:sldId id="259" r:id="rId6"/>
-    <p:sldId id="260" r:id="rId7"/>
-    <p:sldId id="261" r:id="rId8"/>
-    <p:sldId id="262" r:id="rId9"/>
-    <p:sldId id="264" r:id="rId10"/>
+    <p:sldId id="258" r:id="rId7"/>
+    <p:sldId id="260" r:id="rId8"/>
+    <p:sldId id="261" r:id="rId9"/>
+    <p:sldId id="262" r:id="rId10"/>
+    <p:sldId id="264" r:id="rId11"/>
+    <p:sldId id="266" r:id="rId12"/>
   </p:sldIdLst>
   <p:sldSz cx="12192000" cy="6858000"/>
   <p:notesSz cx="6858000" cy="9144000"/>
@@ -267,7 +269,7 @@
           <a:p>
             <a:fld id="{E9CC885B-4903-4D54-9A93-00025F12DED9}" type="datetimeFigureOut">
               <a:rPr kumimoji="1" lang="ja-JP" altLang="en-US" smtClean="0"/>
-              <a:t>2026/10/16</a:t>
+              <a:t>2026/10/21</a:t>
             </a:fld>
             <a:endParaRPr kumimoji="1" lang="ja-JP" altLang="en-US"/>
           </a:p>
@@ -497,7 +499,7 @@
           <a:p>
             <a:fld id="{E9CC885B-4903-4D54-9A93-00025F12DED9}" type="datetimeFigureOut">
               <a:rPr kumimoji="1" lang="ja-JP" altLang="en-US" smtClean="0"/>
-              <a:t>2026/10/16</a:t>
+              <a:t>2026/10/21</a:t>
             </a:fld>
             <a:endParaRPr kumimoji="1" lang="ja-JP" altLang="en-US"/>
           </a:p>
@@ -737,7 +739,7 @@
           <a:p>
             <a:fld id="{E9CC885B-4903-4D54-9A93-00025F12DED9}" type="datetimeFigureOut">
               <a:rPr kumimoji="1" lang="ja-JP" altLang="en-US" smtClean="0"/>
-              <a:t>2026/10/16</a:t>
+              <a:t>2026/10/21</a:t>
             </a:fld>
             <a:endParaRPr kumimoji="1" lang="ja-JP" altLang="en-US"/>
           </a:p>
@@ -967,7 +969,7 @@
           <a:p>
             <a:fld id="{E9CC885B-4903-4D54-9A93-00025F12DED9}" type="datetimeFigureOut">
               <a:rPr kumimoji="1" lang="ja-JP" altLang="en-US" smtClean="0"/>
-              <a:t>2026/10/16</a:t>
+              <a:t>2026/10/21</a:t>
             </a:fld>
             <a:endParaRPr kumimoji="1" lang="ja-JP" altLang="en-US"/>
           </a:p>
@@ -1242,7 +1244,7 @@
           <a:p>
             <a:fld id="{E9CC885B-4903-4D54-9A93-00025F12DED9}" type="datetimeFigureOut">
               <a:rPr kumimoji="1" lang="ja-JP" altLang="en-US" smtClean="0"/>
-              <a:t>2026/10/16</a:t>
+              <a:t>2026/10/21</a:t>
             </a:fld>
             <a:endParaRPr kumimoji="1" lang="ja-JP" altLang="en-US"/>
           </a:p>
@@ -1571,7 +1573,7 @@
           <a:p>
             <a:fld id="{E9CC885B-4903-4D54-9A93-00025F12DED9}" type="datetimeFigureOut">
               <a:rPr kumimoji="1" lang="ja-JP" altLang="en-US" smtClean="0"/>
-              <a:t>2026/10/16</a:t>
+              <a:t>2026/10/21</a:t>
             </a:fld>
             <a:endParaRPr kumimoji="1" lang="ja-JP" altLang="en-US"/>
           </a:p>
@@ -2047,7 +2049,7 @@
           <a:p>
             <a:fld id="{E9CC885B-4903-4D54-9A93-00025F12DED9}" type="datetimeFigureOut">
               <a:rPr kumimoji="1" lang="ja-JP" altLang="en-US" smtClean="0"/>
-              <a:t>2026/10/16</a:t>
+              <a:t>2026/10/21</a:t>
             </a:fld>
             <a:endParaRPr kumimoji="1" lang="ja-JP" altLang="en-US"/>
           </a:p>
@@ -2188,7 +2190,7 @@
           <a:p>
             <a:fld id="{E9CC885B-4903-4D54-9A93-00025F12DED9}" type="datetimeFigureOut">
               <a:rPr kumimoji="1" lang="ja-JP" altLang="en-US" smtClean="0"/>
-              <a:t>2026/10/16</a:t>
+              <a:t>2026/10/21</a:t>
             </a:fld>
             <a:endParaRPr kumimoji="1" lang="ja-JP" altLang="en-US"/>
           </a:p>
@@ -2301,7 +2303,7 @@
           <a:p>
             <a:fld id="{E9CC885B-4903-4D54-9A93-00025F12DED9}" type="datetimeFigureOut">
               <a:rPr kumimoji="1" lang="ja-JP" altLang="en-US" smtClean="0"/>
-              <a:t>2026/10/16</a:t>
+              <a:t>2026/10/21</a:t>
             </a:fld>
             <a:endParaRPr kumimoji="1" lang="ja-JP" altLang="en-US"/>
           </a:p>
@@ -2644,7 +2646,7 @@
           <a:p>
             <a:fld id="{E9CC885B-4903-4D54-9A93-00025F12DED9}" type="datetimeFigureOut">
               <a:rPr kumimoji="1" lang="ja-JP" altLang="en-US" smtClean="0"/>
-              <a:t>2026/10/16</a:t>
+              <a:t>2026/10/21</a:t>
             </a:fld>
             <a:endParaRPr kumimoji="1" lang="ja-JP" altLang="en-US"/>
           </a:p>
@@ -2932,7 +2934,7 @@
           <a:p>
             <a:fld id="{E9CC885B-4903-4D54-9A93-00025F12DED9}" type="datetimeFigureOut">
               <a:rPr kumimoji="1" lang="ja-JP" altLang="en-US" smtClean="0"/>
-              <a:t>2026/10/16</a:t>
+              <a:t>2026/10/21</a:t>
             </a:fld>
             <a:endParaRPr kumimoji="1" lang="ja-JP" altLang="en-US"/>
           </a:p>
@@ -3205,7 +3207,7 @@
           <a:p>
             <a:fld id="{E9CC885B-4903-4D54-9A93-00025F12DED9}" type="datetimeFigureOut">
               <a:rPr kumimoji="1" lang="ja-JP" altLang="en-US" smtClean="0"/>
-              <a:t>2026/10/16</a:t>
+              <a:t>2026/10/21</a:t>
             </a:fld>
             <a:endParaRPr kumimoji="1" lang="ja-JP" altLang="en-US"/>
           </a:p>
@@ -3778,6 +3780,374 @@
 </p:sld>
 </file>
 
+<file path=ppt/slides/slide10.xml><?xml version="1.0" encoding="utf-8"?>
+<p:sld xmlns:a="http://schemas.openxmlformats.org/drawingml/2006/main" xmlns:r="http://schemas.openxmlformats.org/officeDocument/2006/relationships" xmlns:p="http://schemas.openxmlformats.org/presentationml/2006/main">
+  <p:cSld>
+    <p:spTree>
+      <p:nvGrpSpPr>
+        <p:cNvPr id="1" name=""/>
+        <p:cNvGrpSpPr/>
+        <p:nvPr/>
+      </p:nvGrpSpPr>
+      <p:grpSpPr>
+        <a:xfrm>
+          <a:off x="0" y="0"/>
+          <a:ext cx="0" cy="0"/>
+          <a:chOff x="0" y="0"/>
+          <a:chExt cx="0" cy="0"/>
+        </a:xfrm>
+      </p:grpSpPr>
+      <p:sp>
+        <p:nvSpPr>
+          <p:cNvPr id="4" name="テキスト ボックス 3">
+            <a:extLst>
+              <a:ext uri="{FF2B5EF4-FFF2-40B4-BE49-F238E27FC236}">
+                <a16:creationId xmlns:a16="http://schemas.microsoft.com/office/drawing/2014/main" id="{5A13BF46-B8C5-48AA-8308-C9ECFF431A18}"/>
+              </a:ext>
+            </a:extLst>
+          </p:cNvPr>
+          <p:cNvSpPr txBox="1"/>
+          <p:nvPr/>
+        </p:nvSpPr>
+        <p:spPr>
+          <a:xfrm>
+            <a:off x="567542" y="491954"/>
+            <a:ext cx="5636479" cy="584775"/>
+          </a:xfrm>
+          <a:prstGeom prst="rect">
+            <a:avLst/>
+          </a:prstGeom>
+          <a:noFill/>
+        </p:spPr>
+        <p:txBody>
+          <a:bodyPr wrap="none" rtlCol="0">
+            <a:spAutoFit/>
+          </a:bodyPr>
+          <a:lstStyle/>
+          <a:p>
+            <a:r>
+              <a:rPr kumimoji="1" lang="ja-JP" altLang="en-US" sz="3200" b="1" u="sng" dirty="0"/>
+              <a:t>学生ゲーム展示会 当日の動き</a:t>
+            </a:r>
+          </a:p>
+        </p:txBody>
+      </p:sp>
+      <p:sp>
+        <p:nvSpPr>
+          <p:cNvPr id="6" name="テキスト ボックス 5">
+            <a:extLst>
+              <a:ext uri="{FF2B5EF4-FFF2-40B4-BE49-F238E27FC236}">
+                <a16:creationId xmlns:a16="http://schemas.microsoft.com/office/drawing/2014/main" id="{55830AD6-028B-4C4E-80BF-B70DFC1C3A46}"/>
+              </a:ext>
+            </a:extLst>
+          </p:cNvPr>
+          <p:cNvSpPr txBox="1"/>
+          <p:nvPr/>
+        </p:nvSpPr>
+        <p:spPr>
+          <a:xfrm>
+            <a:off x="567542" y="1216429"/>
+            <a:ext cx="9725739" cy="4893647"/>
+          </a:xfrm>
+          <a:prstGeom prst="rect">
+            <a:avLst/>
+          </a:prstGeom>
+          <a:noFill/>
+        </p:spPr>
+        <p:txBody>
+          <a:bodyPr wrap="none" rtlCol="0">
+            <a:spAutoFit/>
+          </a:bodyPr>
+          <a:lstStyle/>
+          <a:p>
+            <a:r>
+              <a:rPr lang="ja-JP" altLang="en-US" sz="2400" dirty="0"/>
+              <a:t>それぞれの係の役割です</a:t>
+            </a:r>
+            <a:endParaRPr lang="en-US" altLang="ja-JP" sz="2400" dirty="0"/>
+          </a:p>
+          <a:p>
+            <a:endParaRPr lang="en-US" altLang="ja-JP" sz="2400" dirty="0"/>
+          </a:p>
+          <a:p>
+            <a:r>
+              <a:rPr lang="ja-JP" altLang="en-US" sz="2400" b="1" dirty="0">
+                <a:solidFill>
+                  <a:srgbClr val="FF0000"/>
+                </a:solidFill>
+              </a:rPr>
+              <a:t>■案内係</a:t>
+            </a:r>
+            <a:endParaRPr lang="en-US" altLang="ja-JP" sz="2400" b="1" dirty="0">
+              <a:solidFill>
+                <a:srgbClr val="FF0000"/>
+              </a:solidFill>
+            </a:endParaRPr>
+          </a:p>
+          <a:p>
+            <a:r>
+              <a:rPr lang="ja-JP" altLang="en-US" sz="2400" dirty="0"/>
+              <a:t>学校まで来られた方を</a:t>
+            </a:r>
+            <a:r>
+              <a:rPr lang="en-US" altLang="ja-JP" sz="2400" dirty="0"/>
+              <a:t>6</a:t>
+            </a:r>
+            <a:r>
+              <a:rPr lang="ja-JP" altLang="en-US" sz="2400" dirty="0"/>
+              <a:t>階の受付まで案内する係</a:t>
+            </a:r>
+            <a:endParaRPr lang="en-US" altLang="ja-JP" sz="2400" dirty="0"/>
+          </a:p>
+          <a:p>
+            <a:endParaRPr lang="en-US" altLang="ja-JP" sz="2400" dirty="0"/>
+          </a:p>
+          <a:p>
+            <a:r>
+              <a:rPr lang="ja-JP" altLang="en-US" sz="2400" b="1" dirty="0">
+                <a:solidFill>
+                  <a:srgbClr val="FF0000"/>
+                </a:solidFill>
+              </a:rPr>
+              <a:t>■受付係</a:t>
+            </a:r>
+            <a:endParaRPr lang="en-US" altLang="ja-JP" sz="2400" b="1" dirty="0">
+              <a:solidFill>
+                <a:srgbClr val="FF0000"/>
+              </a:solidFill>
+            </a:endParaRPr>
+          </a:p>
+          <a:p>
+            <a:r>
+              <a:rPr lang="ja-JP" altLang="en-US" sz="2400" dirty="0"/>
+              <a:t>企業、保護者、在校生、高校生ごとに会社名や名前を書いてもらい、</a:t>
+            </a:r>
+            <a:endParaRPr lang="en-US" altLang="ja-JP" sz="2400" dirty="0"/>
+          </a:p>
+          <a:p>
+            <a:r>
+              <a:rPr lang="ja-JP" altLang="en-US" sz="2400" dirty="0"/>
+              <a:t>資料を渡した後に教室の場所を案内する係。</a:t>
+            </a:r>
+            <a:endParaRPr lang="en-US" altLang="ja-JP" sz="2400" dirty="0"/>
+          </a:p>
+          <a:p>
+            <a:r>
+              <a:rPr lang="ja-JP" altLang="en-US" sz="2400" dirty="0"/>
+              <a:t>企業の場合は名刺の受け取りもする。</a:t>
+            </a:r>
+            <a:endParaRPr lang="en-US" altLang="ja-JP" sz="2400" dirty="0"/>
+          </a:p>
+          <a:p>
+            <a:endParaRPr lang="en-US" altLang="ja-JP" sz="2400" dirty="0"/>
+          </a:p>
+          <a:p>
+            <a:r>
+              <a:rPr lang="ja-JP" altLang="en-US" sz="2400" b="1" dirty="0">
+                <a:solidFill>
+                  <a:srgbClr val="FF0000"/>
+                </a:solidFill>
+              </a:rPr>
+              <a:t>■展示ブースのアシスタント</a:t>
+            </a:r>
+            <a:endParaRPr lang="en-US" altLang="ja-JP" sz="2400" b="1" dirty="0">
+              <a:solidFill>
+                <a:srgbClr val="FF0000"/>
+              </a:solidFill>
+            </a:endParaRPr>
+          </a:p>
+          <a:p>
+            <a:r>
+              <a:rPr lang="ja-JP" altLang="en-US" sz="2400" dirty="0"/>
+              <a:t>展示してる人が休憩しているときに代わりに対応する係。</a:t>
+            </a:r>
+            <a:endParaRPr lang="en-US" altLang="ja-JP" sz="2400" dirty="0"/>
+          </a:p>
+          <a:p>
+            <a:r>
+              <a:rPr lang="ja-JP" altLang="en-US" sz="2400" dirty="0"/>
+              <a:t>会場が混雑しているときの整理も兼用。</a:t>
+            </a:r>
+            <a:endParaRPr lang="en-US" altLang="ja-JP" sz="2400" dirty="0"/>
+          </a:p>
+        </p:txBody>
+      </p:sp>
+    </p:spTree>
+    <p:extLst>
+      <p:ext uri="{BB962C8B-B14F-4D97-AF65-F5344CB8AC3E}">
+        <p14:creationId xmlns:p14="http://schemas.microsoft.com/office/powerpoint/2010/main" val="829780203"/>
+      </p:ext>
+    </p:extLst>
+  </p:cSld>
+  <p:clrMapOvr>
+    <a:masterClrMapping/>
+  </p:clrMapOvr>
+</p:sld>
+</file>
+
+<file path=ppt/slides/slide11.xml><?xml version="1.0" encoding="utf-8"?>
+<p:sld xmlns:a="http://schemas.openxmlformats.org/drawingml/2006/main" xmlns:r="http://schemas.openxmlformats.org/officeDocument/2006/relationships" xmlns:p="http://schemas.openxmlformats.org/presentationml/2006/main">
+  <p:cSld>
+    <p:spTree>
+      <p:nvGrpSpPr>
+        <p:cNvPr id="1" name=""/>
+        <p:cNvGrpSpPr/>
+        <p:nvPr/>
+      </p:nvGrpSpPr>
+      <p:grpSpPr>
+        <a:xfrm>
+          <a:off x="0" y="0"/>
+          <a:ext cx="0" cy="0"/>
+          <a:chOff x="0" y="0"/>
+          <a:chExt cx="0" cy="0"/>
+        </a:xfrm>
+      </p:grpSpPr>
+      <p:sp>
+        <p:nvSpPr>
+          <p:cNvPr id="4" name="テキスト ボックス 3">
+            <a:extLst>
+              <a:ext uri="{FF2B5EF4-FFF2-40B4-BE49-F238E27FC236}">
+                <a16:creationId xmlns:a16="http://schemas.microsoft.com/office/drawing/2014/main" id="{5A13BF46-B8C5-48AA-8308-C9ECFF431A18}"/>
+              </a:ext>
+            </a:extLst>
+          </p:cNvPr>
+          <p:cNvSpPr txBox="1"/>
+          <p:nvPr/>
+        </p:nvSpPr>
+        <p:spPr>
+          <a:xfrm>
+            <a:off x="567542" y="491954"/>
+            <a:ext cx="4815742" cy="584775"/>
+          </a:xfrm>
+          <a:prstGeom prst="rect">
+            <a:avLst/>
+          </a:prstGeom>
+          <a:noFill/>
+        </p:spPr>
+        <p:txBody>
+          <a:bodyPr wrap="none" rtlCol="0">
+            <a:spAutoFit/>
+          </a:bodyPr>
+          <a:lstStyle/>
+          <a:p>
+            <a:r>
+              <a:rPr kumimoji="1" lang="ja-JP" altLang="en-US" sz="3200" b="1" u="sng" dirty="0"/>
+              <a:t>学生ゲーム展示会 まとめ</a:t>
+            </a:r>
+          </a:p>
+        </p:txBody>
+      </p:sp>
+      <p:sp>
+        <p:nvSpPr>
+          <p:cNvPr id="6" name="テキスト ボックス 5">
+            <a:extLst>
+              <a:ext uri="{FF2B5EF4-FFF2-40B4-BE49-F238E27FC236}">
+                <a16:creationId xmlns:a16="http://schemas.microsoft.com/office/drawing/2014/main" id="{55830AD6-028B-4C4E-80BF-B70DFC1C3A46}"/>
+              </a:ext>
+            </a:extLst>
+          </p:cNvPr>
+          <p:cNvSpPr txBox="1"/>
+          <p:nvPr/>
+        </p:nvSpPr>
+        <p:spPr>
+          <a:xfrm>
+            <a:off x="567542" y="1216429"/>
+            <a:ext cx="10956846" cy="4154984"/>
+          </a:xfrm>
+          <a:prstGeom prst="rect">
+            <a:avLst/>
+          </a:prstGeom>
+          <a:noFill/>
+        </p:spPr>
+        <p:txBody>
+          <a:bodyPr wrap="none" rtlCol="0">
+            <a:spAutoFit/>
+          </a:bodyPr>
+          <a:lstStyle/>
+          <a:p>
+            <a:r>
+              <a:rPr lang="ja-JP" altLang="en-US" sz="2400" dirty="0"/>
+              <a:t>■３年生</a:t>
+            </a:r>
+            <a:endParaRPr lang="en-US" altLang="ja-JP" sz="2400" dirty="0"/>
+          </a:p>
+          <a:p>
+            <a:r>
+              <a:rPr lang="ja-JP" altLang="en-US" sz="2400" dirty="0"/>
+              <a:t>悔いの残らないように頑張りましょう。</a:t>
+            </a:r>
+            <a:endParaRPr lang="en-US" altLang="ja-JP" sz="2400" dirty="0"/>
+          </a:p>
+          <a:p>
+            <a:endParaRPr lang="en-US" altLang="ja-JP" sz="2400" dirty="0"/>
+          </a:p>
+          <a:p>
+            <a:r>
+              <a:rPr lang="ja-JP" altLang="en-US" sz="2400" dirty="0"/>
+              <a:t>■２年生</a:t>
+            </a:r>
+            <a:endParaRPr lang="en-US" altLang="ja-JP" sz="2400" dirty="0"/>
+          </a:p>
+          <a:p>
+            <a:r>
+              <a:rPr lang="ja-JP" altLang="en-US" sz="2400" dirty="0"/>
+              <a:t>企業からスカウトされる可能性も十分あります。</a:t>
+            </a:r>
+            <a:endParaRPr lang="en-US" altLang="ja-JP" sz="2400" dirty="0"/>
+          </a:p>
+          <a:p>
+            <a:r>
+              <a:rPr lang="ja-JP" altLang="en-US" sz="2400" dirty="0"/>
+              <a:t>作品をしっかりと仕上げて、準備も抜かりなく行いましょう。</a:t>
+            </a:r>
+            <a:endParaRPr lang="en-US" altLang="ja-JP" sz="2400" dirty="0"/>
+          </a:p>
+          <a:p>
+            <a:endParaRPr lang="en-US" altLang="ja-JP" sz="2400" dirty="0"/>
+          </a:p>
+          <a:p>
+            <a:r>
+              <a:rPr lang="ja-JP" altLang="en-US" sz="2400" dirty="0"/>
+              <a:t>■１年生</a:t>
+            </a:r>
+            <a:endParaRPr lang="en-US" altLang="ja-JP" sz="2400" dirty="0"/>
+          </a:p>
+          <a:p>
+            <a:r>
+              <a:rPr lang="ja-JP" altLang="en-US" sz="2400" dirty="0"/>
+              <a:t>遊んでくれた人たちの意見を大事にしましょう。</a:t>
+            </a:r>
+            <a:endParaRPr lang="en-US" altLang="ja-JP" sz="2400" dirty="0"/>
+          </a:p>
+          <a:p>
+            <a:r>
+              <a:rPr lang="ja-JP" altLang="en-US" sz="2400" dirty="0"/>
+              <a:t>特に企業の方からは、多くのアドバイスを頂けると思います。</a:t>
+            </a:r>
+            <a:endParaRPr lang="en-US" altLang="ja-JP" sz="2400" dirty="0"/>
+          </a:p>
+          <a:p>
+            <a:r>
+              <a:rPr lang="ja-JP" altLang="en-US" sz="2400" dirty="0"/>
+              <a:t>場合によっては、インターンのお誘いや、就職にも良い影響が出るかもです。</a:t>
+            </a:r>
+            <a:endParaRPr lang="en-US" altLang="ja-JP" sz="2400" dirty="0"/>
+          </a:p>
+        </p:txBody>
+      </p:sp>
+    </p:spTree>
+    <p:extLst>
+      <p:ext uri="{BB962C8B-B14F-4D97-AF65-F5344CB8AC3E}">
+        <p14:creationId xmlns:p14="http://schemas.microsoft.com/office/powerpoint/2010/main" val="2813995559"/>
+      </p:ext>
+    </p:extLst>
+  </p:cSld>
+  <p:clrMapOvr>
+    <a:masterClrMapping/>
+  </p:clrMapOvr>
+</p:sld>
+</file>
+
 <file path=ppt/slides/slide2.xml><?xml version="1.0" encoding="utf-8"?>
 <p:sld xmlns:a="http://schemas.openxmlformats.org/drawingml/2006/main" xmlns:r="http://schemas.openxmlformats.org/officeDocument/2006/relationships" xmlns:p="http://schemas.openxmlformats.org/presentationml/2006/main">
   <p:cSld>
@@ -4070,7 +4440,7 @@
         <p:spPr>
           <a:xfrm>
             <a:off x="567542" y="491954"/>
-            <a:ext cx="6046848" cy="584775"/>
+            <a:ext cx="6340197" cy="584775"/>
           </a:xfrm>
           <a:prstGeom prst="rect">
             <a:avLst/>
@@ -4085,7 +4455,7 @@
           <a:p>
             <a:r>
               <a:rPr kumimoji="1" lang="ja-JP" altLang="en-US" sz="3200" b="1" u="sng" dirty="0"/>
-              <a:t>学生ゲーム展示会 展示するには</a:t>
+              <a:t>学生ゲーム展示会　スケジュール</a:t>
             </a:r>
           </a:p>
         </p:txBody>
@@ -4105,7 +4475,7 @@
         <p:spPr>
           <a:xfrm>
             <a:off x="567542" y="1216429"/>
-            <a:ext cx="9533379" cy="4524315"/>
+            <a:ext cx="5772734" cy="4154984"/>
           </a:xfrm>
           <a:prstGeom prst="rect">
             <a:avLst/>
@@ -4120,79 +4490,32 @@
           <a:p>
             <a:r>
               <a:rPr lang="ja-JP" altLang="en-US" sz="2400" dirty="0"/>
-              <a:t>全員ゲームを展示するわけではありません。</a:t>
-            </a:r>
-            <a:endParaRPr lang="en-US" altLang="ja-JP" sz="2400" dirty="0"/>
-          </a:p>
-          <a:p>
-            <a:r>
-              <a:rPr lang="ja-JP" altLang="en-US" sz="2400" dirty="0"/>
-              <a:t>展示条件は学年ごとに異なります。</a:t>
-            </a:r>
-            <a:endParaRPr lang="en-US" altLang="ja-JP" sz="2400" dirty="0"/>
-          </a:p>
-          <a:p>
-            <a:endParaRPr lang="en-US" altLang="ja-JP" sz="2400" dirty="0"/>
-          </a:p>
-          <a:p>
-            <a:r>
-              <a:rPr lang="ja-JP" altLang="en-US" sz="2400" b="1" dirty="0">
-                <a:solidFill>
-                  <a:srgbClr val="FF0000"/>
-                </a:solidFill>
-              </a:rPr>
-              <a:t>■展示条件</a:t>
-            </a:r>
-            <a:endParaRPr lang="en-US" altLang="ja-JP" sz="2400" b="1" dirty="0">
-              <a:solidFill>
-                <a:srgbClr val="FF0000"/>
-              </a:solidFill>
-            </a:endParaRPr>
-          </a:p>
-          <a:p>
-            <a:r>
-              <a:rPr lang="ja-JP" altLang="en-US" sz="2400" dirty="0"/>
-              <a:t>・</a:t>
-            </a:r>
+              <a:t>以下、スケジュールです</a:t>
+            </a:r>
+            <a:endParaRPr lang="en-US" altLang="ja-JP" sz="2400" dirty="0"/>
+          </a:p>
+          <a:p>
+            <a:endParaRPr lang="en-US" altLang="ja-JP" sz="2400" dirty="0"/>
+          </a:p>
+          <a:p>
             <a:r>
               <a:rPr lang="en-US" altLang="ja-JP" sz="2400" dirty="0"/>
-              <a:t>3</a:t>
-            </a:r>
-            <a:r>
-              <a:rPr lang="ja-JP" altLang="en-US" sz="2400" dirty="0"/>
-              <a:t>年生</a:t>
-            </a:r>
-            <a:endParaRPr lang="en-US" altLang="ja-JP" sz="2400" dirty="0"/>
-          </a:p>
-          <a:p>
-            <a:r>
-              <a:rPr lang="ja-JP" altLang="en-US" sz="2400" dirty="0"/>
-              <a:t>　全チーム展示</a:t>
-            </a:r>
-            <a:endParaRPr lang="en-US" altLang="ja-JP" sz="2400" dirty="0"/>
-          </a:p>
-          <a:p>
-            <a:endParaRPr lang="en-US" altLang="ja-JP" sz="2400" dirty="0"/>
-          </a:p>
-          <a:p>
-            <a:r>
-              <a:rPr lang="ja-JP" altLang="en-US" sz="2400" dirty="0"/>
-              <a:t>・</a:t>
-            </a:r>
+              <a:t>1/25</a:t>
+            </a:r>
+            <a:r>
+              <a:rPr lang="ja-JP" altLang="en-US" sz="2400" dirty="0"/>
+              <a:t>（月）展示作品審査用提出</a:t>
+            </a:r>
+            <a:endParaRPr lang="en-US" altLang="ja-JP" sz="2400" dirty="0"/>
+          </a:p>
+          <a:p>
             <a:r>
               <a:rPr lang="en-US" altLang="ja-JP" sz="2400" dirty="0"/>
-              <a:t>1,2</a:t>
-            </a:r>
-            <a:r>
-              <a:rPr lang="ja-JP" altLang="en-US" sz="2400" dirty="0"/>
-              <a:t>年生</a:t>
-            </a:r>
-            <a:endParaRPr lang="en-US" altLang="ja-JP" sz="2400" dirty="0"/>
-          </a:p>
-          <a:p>
-            <a:r>
-              <a:rPr lang="ja-JP" altLang="en-US" sz="2400" dirty="0"/>
-              <a:t>　ゲーム科教員から展示許可が出た作品のみ展示</a:t>
+              <a:t>※</a:t>
+            </a:r>
+            <a:r>
+              <a:rPr lang="ja-JP" altLang="en-US" sz="2400" dirty="0"/>
+              <a:t>学年ごとに前後します</a:t>
             </a:r>
             <a:endParaRPr lang="en-US" altLang="ja-JP" sz="2400" dirty="0"/>
           </a:p>
@@ -4202,18 +4525,46 @@
           <a:p>
             <a:r>
               <a:rPr lang="en-US" altLang="ja-JP" sz="2400" dirty="0"/>
-              <a:t>1,2</a:t>
-            </a:r>
-            <a:r>
-              <a:rPr lang="ja-JP" altLang="en-US" sz="2400" dirty="0"/>
-              <a:t>年生は遊んでもらう価値があると判断した作品のみ展示します。</a:t>
-            </a:r>
-            <a:endParaRPr lang="en-US" altLang="ja-JP" sz="2400" dirty="0"/>
-          </a:p>
-          <a:p>
-            <a:r>
-              <a:rPr lang="ja-JP" altLang="en-US" sz="2400" dirty="0"/>
-              <a:t>企業の方も来校するため、非常に厳しい基準で判断します。</a:t>
+              <a:t>1/28</a:t>
+            </a:r>
+            <a:r>
+              <a:rPr lang="ja-JP" altLang="en-US" sz="2400" dirty="0"/>
+              <a:t>（水）展示する作品発表　準備開始</a:t>
+            </a:r>
+            <a:endParaRPr lang="en-US" altLang="ja-JP" sz="2400" dirty="0"/>
+          </a:p>
+          <a:p>
+            <a:endParaRPr lang="en-US" altLang="ja-JP" sz="2400" dirty="0"/>
+          </a:p>
+          <a:p>
+            <a:r>
+              <a:rPr lang="ja-JP" altLang="en-US" sz="2400" dirty="0"/>
+              <a:t>～準備期間～</a:t>
+            </a:r>
+            <a:endParaRPr lang="en-US" altLang="ja-JP" sz="2400" dirty="0"/>
+          </a:p>
+          <a:p>
+            <a:r>
+              <a:rPr lang="en-US" altLang="ja-JP" sz="2400" dirty="0"/>
+              <a:t>※</a:t>
+            </a:r>
+            <a:r>
+              <a:rPr lang="ja-JP" altLang="en-US" sz="2400" dirty="0"/>
+              <a:t>通常通り授業もあります</a:t>
+            </a:r>
+            <a:endParaRPr lang="en-US" altLang="ja-JP" sz="2400" dirty="0"/>
+          </a:p>
+          <a:p>
+            <a:endParaRPr lang="en-US" altLang="ja-JP" sz="2400" dirty="0"/>
+          </a:p>
+          <a:p>
+            <a:r>
+              <a:rPr lang="en-US" altLang="ja-JP" sz="2400" dirty="0"/>
+              <a:t>2/5</a:t>
+            </a:r>
+            <a:r>
+              <a:rPr lang="ja-JP" altLang="en-US" sz="2400" dirty="0"/>
+              <a:t>（金）展示会当日</a:t>
             </a:r>
             <a:endParaRPr lang="en-US" altLang="ja-JP" sz="2400" dirty="0"/>
           </a:p>
@@ -4222,7 +4573,7 @@
     </p:spTree>
     <p:extLst>
       <p:ext uri="{BB962C8B-B14F-4D97-AF65-F5344CB8AC3E}">
-        <p14:creationId xmlns:p14="http://schemas.microsoft.com/office/powerpoint/2010/main" val="612605412"/>
+        <p14:creationId xmlns:p14="http://schemas.microsoft.com/office/powerpoint/2010/main" val="3066841637"/>
       </p:ext>
     </p:extLst>
   </p:cSld>
@@ -4299,7 +4650,7 @@
         <p:spPr>
           <a:xfrm>
             <a:off x="567542" y="1216429"/>
-            <a:ext cx="9725739" cy="5262979"/>
+            <a:ext cx="9533379" cy="4524315"/>
           </a:xfrm>
           <a:prstGeom prst="rect">
             <a:avLst/>
@@ -4313,72 +4664,15 @@
           <a:lstStyle/>
           <a:p>
             <a:r>
-              <a:rPr lang="en-US" altLang="ja-JP" sz="2400" dirty="0"/>
-              <a:t>1,2</a:t>
-            </a:r>
-            <a:r>
-              <a:rPr lang="ja-JP" altLang="en-US" sz="2400" dirty="0"/>
-              <a:t>年生の作品について、判断基準は以下の通りです</a:t>
-            </a:r>
-            <a:endParaRPr lang="en-US" altLang="ja-JP" sz="2400" dirty="0"/>
-          </a:p>
-          <a:p>
-            <a:endParaRPr lang="en-US" altLang="ja-JP" sz="2400" dirty="0"/>
-          </a:p>
-          <a:p>
-            <a:r>
-              <a:rPr lang="ja-JP" altLang="en-US" sz="2400" dirty="0"/>
-              <a:t>・普段の生活態度から企業の方と接触しても問題ないと思われること</a:t>
-            </a:r>
-            <a:endParaRPr lang="en-US" altLang="ja-JP" sz="2400" dirty="0"/>
-          </a:p>
-          <a:p>
-            <a:r>
-              <a:rPr lang="ja-JP" altLang="en-US" sz="2400" dirty="0"/>
-              <a:t>・完成した作品であること</a:t>
-            </a:r>
-            <a:endParaRPr lang="en-US" altLang="ja-JP" sz="2400" dirty="0"/>
-          </a:p>
-          <a:p>
-            <a:r>
-              <a:rPr lang="ja-JP" altLang="en-US" sz="2400" dirty="0"/>
-              <a:t>・説明書やチュートリアルを見ただけで遊べること</a:t>
-            </a:r>
-            <a:endParaRPr lang="en-US" altLang="ja-JP" sz="2400" dirty="0"/>
-          </a:p>
-          <a:p>
-            <a:r>
-              <a:rPr lang="ja-JP" altLang="en-US" sz="2400" dirty="0"/>
-              <a:t>・面白い仕組みが明確にあること</a:t>
-            </a:r>
-            <a:endParaRPr lang="en-US" altLang="ja-JP" sz="2400" dirty="0"/>
-          </a:p>
-          <a:p>
-            <a:r>
-              <a:rPr lang="ja-JP" altLang="en-US" sz="2400" dirty="0"/>
-              <a:t>・バグがないこと</a:t>
-            </a:r>
-            <a:endParaRPr lang="en-US" altLang="ja-JP" sz="2400" dirty="0"/>
-          </a:p>
-          <a:p>
-            <a:r>
-              <a:rPr lang="ja-JP" altLang="en-US" sz="2400" dirty="0"/>
-              <a:t>・ゲームとして必要なものが全てそろっていること</a:t>
-            </a:r>
-            <a:endParaRPr lang="en-US" altLang="ja-JP" sz="2400" dirty="0"/>
-          </a:p>
-          <a:p>
-            <a:r>
-              <a:rPr lang="ja-JP" altLang="en-US" sz="2400" dirty="0"/>
-              <a:t>　・各画面、</a:t>
-            </a:r>
-            <a:r>
-              <a:rPr lang="en-US" altLang="ja-JP" sz="2400" dirty="0"/>
-              <a:t>SE</a:t>
-            </a:r>
-            <a:r>
-              <a:rPr lang="ja-JP" altLang="en-US" sz="2400" dirty="0"/>
-              <a:t>、エフェクト、サウンドなど</a:t>
+              <a:rPr lang="ja-JP" altLang="en-US" sz="2400" dirty="0"/>
+              <a:t>全員ゲームを展示するわけではありません。</a:t>
+            </a:r>
+            <a:endParaRPr lang="en-US" altLang="ja-JP" sz="2400" dirty="0"/>
+          </a:p>
+          <a:p>
+            <a:r>
+              <a:rPr lang="ja-JP" altLang="en-US" sz="2400" dirty="0"/>
+              <a:t>展示条件は学年ごとに異なります。</a:t>
             </a:r>
             <a:endParaRPr lang="en-US" altLang="ja-JP" sz="2400" dirty="0"/>
           </a:p>
@@ -4392,7 +4686,7 @@
                   <a:srgbClr val="FF0000"/>
                 </a:solidFill>
               </a:rPr>
-              <a:t>以下は許可しない例</a:t>
+              <a:t>■展示条件</a:t>
             </a:r>
             <a:endParaRPr lang="en-US" altLang="ja-JP" sz="2400" b="1" dirty="0">
               <a:solidFill>
@@ -4403,21 +4697,68 @@
           <a:p>
             <a:r>
               <a:rPr lang="ja-JP" altLang="en-US" sz="2400" dirty="0"/>
-              <a:t>・見た目だけよくて面白くないもの</a:t>
-            </a:r>
-            <a:endParaRPr lang="en-US" altLang="ja-JP" sz="2400" dirty="0"/>
-          </a:p>
-          <a:p>
-            <a:r>
-              <a:rPr lang="ja-JP" altLang="en-US" sz="2400" dirty="0"/>
-              <a:t>・ゲームプレイ部分はできていても、他画面の質が悪いもの</a:t>
-            </a:r>
-            <a:endParaRPr lang="en-US" altLang="ja-JP" sz="2400" dirty="0"/>
-          </a:p>
-          <a:p>
-            <a:r>
-              <a:rPr lang="ja-JP" altLang="en-US" sz="2400" dirty="0"/>
-              <a:t>・ボタン配置などで操作感が悪く遊びにくいもの</a:t>
+              <a:t>・</a:t>
+            </a:r>
+            <a:r>
+              <a:rPr lang="en-US" altLang="ja-JP" sz="2400" dirty="0"/>
+              <a:t>3</a:t>
+            </a:r>
+            <a:r>
+              <a:rPr lang="ja-JP" altLang="en-US" sz="2400" dirty="0"/>
+              <a:t>年生</a:t>
+            </a:r>
+            <a:endParaRPr lang="en-US" altLang="ja-JP" sz="2400" dirty="0"/>
+          </a:p>
+          <a:p>
+            <a:r>
+              <a:rPr lang="ja-JP" altLang="en-US" sz="2400" dirty="0"/>
+              <a:t>　全チーム展示</a:t>
+            </a:r>
+            <a:endParaRPr lang="en-US" altLang="ja-JP" sz="2400" dirty="0"/>
+          </a:p>
+          <a:p>
+            <a:endParaRPr lang="en-US" altLang="ja-JP" sz="2400" dirty="0"/>
+          </a:p>
+          <a:p>
+            <a:r>
+              <a:rPr lang="ja-JP" altLang="en-US" sz="2400" dirty="0"/>
+              <a:t>・</a:t>
+            </a:r>
+            <a:r>
+              <a:rPr lang="en-US" altLang="ja-JP" sz="2400" dirty="0"/>
+              <a:t>1,2</a:t>
+            </a:r>
+            <a:r>
+              <a:rPr lang="ja-JP" altLang="en-US" sz="2400" dirty="0"/>
+              <a:t>年生</a:t>
+            </a:r>
+            <a:endParaRPr lang="en-US" altLang="ja-JP" sz="2400" dirty="0"/>
+          </a:p>
+          <a:p>
+            <a:r>
+              <a:rPr lang="ja-JP" altLang="en-US" sz="2400" dirty="0"/>
+              <a:t>　ゲーム科教員から展示許可が出た作品のみ展示</a:t>
+            </a:r>
+            <a:endParaRPr lang="en-US" altLang="ja-JP" sz="2400" dirty="0"/>
+          </a:p>
+          <a:p>
+            <a:endParaRPr lang="en-US" altLang="ja-JP" sz="2400" dirty="0"/>
+          </a:p>
+          <a:p>
+            <a:r>
+              <a:rPr lang="en-US" altLang="ja-JP" sz="2400" dirty="0"/>
+              <a:t>1,2</a:t>
+            </a:r>
+            <a:r>
+              <a:rPr lang="ja-JP" altLang="en-US" sz="2400" dirty="0"/>
+              <a:t>年生は遊んでもらう価値があると判断した作品のみ展示します。</a:t>
+            </a:r>
+            <a:endParaRPr lang="en-US" altLang="ja-JP" sz="2400" dirty="0"/>
+          </a:p>
+          <a:p>
+            <a:r>
+              <a:rPr lang="ja-JP" altLang="en-US" sz="2400" dirty="0"/>
+              <a:t>企業の方も来校するため、非常に厳しい基準で判断します。</a:t>
             </a:r>
             <a:endParaRPr lang="en-US" altLang="ja-JP" sz="2400" dirty="0"/>
           </a:p>
@@ -4426,7 +4767,7 @@
     </p:spTree>
     <p:extLst>
       <p:ext uri="{BB962C8B-B14F-4D97-AF65-F5344CB8AC3E}">
-        <p14:creationId xmlns:p14="http://schemas.microsoft.com/office/powerpoint/2010/main" val="1621185352"/>
+        <p14:creationId xmlns:p14="http://schemas.microsoft.com/office/powerpoint/2010/main" val="612605412"/>
       </p:ext>
     </p:extLst>
   </p:cSld>
@@ -4644,7 +4985,7 @@
         <p:spPr>
           <a:xfrm>
             <a:off x="567542" y="491954"/>
-            <a:ext cx="4405373" cy="584775"/>
+            <a:ext cx="6046848" cy="584775"/>
           </a:xfrm>
           <a:prstGeom prst="rect">
             <a:avLst/>
@@ -4659,7 +5000,7 @@
           <a:p>
             <a:r>
               <a:rPr kumimoji="1" lang="ja-JP" altLang="en-US" sz="3200" b="1" u="sng" dirty="0"/>
-              <a:t>学生ゲーム展示会 準備</a:t>
+              <a:t>学生ゲーム展示会 展示するには</a:t>
             </a:r>
           </a:p>
         </p:txBody>
@@ -4679,7 +5020,7 @@
         <p:spPr>
           <a:xfrm>
             <a:off x="567542" y="1216429"/>
-            <a:ext cx="6340197" cy="3416320"/>
+            <a:ext cx="9725739" cy="5262979"/>
           </a:xfrm>
           <a:prstGeom prst="rect">
             <a:avLst/>
@@ -4693,56 +5034,111 @@
           <a:lstStyle/>
           <a:p>
             <a:r>
-              <a:rPr lang="ja-JP" altLang="en-US" sz="2400" dirty="0"/>
-              <a:t>一大イベントなので準備もたくさんあります</a:t>
-            </a:r>
-            <a:endParaRPr lang="en-US" altLang="ja-JP" sz="2400" dirty="0"/>
-          </a:p>
-          <a:p>
-            <a:endParaRPr lang="en-US" altLang="ja-JP" sz="2400" dirty="0"/>
-          </a:p>
-          <a:p>
-            <a:r>
-              <a:rPr lang="ja-JP" altLang="en-US" sz="2400" dirty="0"/>
-              <a:t>・広告ポスター作り</a:t>
-            </a:r>
-            <a:endParaRPr lang="en-US" altLang="ja-JP" sz="2400" dirty="0"/>
-          </a:p>
-          <a:p>
-            <a:r>
-              <a:rPr lang="ja-JP" altLang="en-US" sz="2400" dirty="0"/>
-              <a:t>・経路案内づくり</a:t>
-            </a:r>
-            <a:endParaRPr lang="en-US" altLang="ja-JP" sz="2400" dirty="0"/>
-          </a:p>
-          <a:p>
-            <a:r>
-              <a:rPr lang="ja-JP" altLang="en-US" sz="2400" dirty="0"/>
-              <a:t>・飾り付け</a:t>
-            </a:r>
-            <a:endParaRPr lang="en-US" altLang="ja-JP" sz="2400" dirty="0"/>
-          </a:p>
-          <a:p>
-            <a:r>
-              <a:rPr lang="ja-JP" altLang="en-US" sz="2400" dirty="0"/>
-              <a:t>・ゲーム資料作り</a:t>
-            </a:r>
-            <a:endParaRPr lang="en-US" altLang="ja-JP" sz="2400" dirty="0"/>
-          </a:p>
-          <a:p>
-            <a:r>
-              <a:rPr lang="ja-JP" altLang="en-US" sz="2400" dirty="0"/>
-              <a:t>・展示作品動画作り</a:t>
-            </a:r>
-            <a:endParaRPr lang="en-US" altLang="ja-JP" sz="2400" dirty="0"/>
-          </a:p>
-          <a:p>
-            <a:endParaRPr lang="en-US" altLang="ja-JP" sz="2400" dirty="0"/>
-          </a:p>
-          <a:p>
-            <a:r>
-              <a:rPr lang="ja-JP" altLang="en-US" sz="2400" dirty="0"/>
-              <a:t>学生主体で準備しましょう。</a:t>
+              <a:rPr lang="en-US" altLang="ja-JP" sz="2400" dirty="0"/>
+              <a:t>1,2</a:t>
+            </a:r>
+            <a:r>
+              <a:rPr lang="ja-JP" altLang="en-US" sz="2400" dirty="0"/>
+              <a:t>年生の展示について、判断基準は以下の通りです</a:t>
+            </a:r>
+            <a:endParaRPr lang="en-US" altLang="ja-JP" sz="2400" dirty="0"/>
+          </a:p>
+          <a:p>
+            <a:endParaRPr lang="en-US" altLang="ja-JP" sz="2400" dirty="0"/>
+          </a:p>
+          <a:p>
+            <a:r>
+              <a:rPr lang="ja-JP" altLang="en-US" sz="2400" dirty="0"/>
+              <a:t>・普段の生活態度から企業の方と接触しても問題ないと思われること</a:t>
+            </a:r>
+            <a:endParaRPr lang="en-US" altLang="ja-JP" sz="2400" dirty="0"/>
+          </a:p>
+          <a:p>
+            <a:r>
+              <a:rPr lang="ja-JP" altLang="en-US" sz="2400" dirty="0"/>
+              <a:t>・完成した作品であること</a:t>
+            </a:r>
+            <a:endParaRPr lang="en-US" altLang="ja-JP" sz="2400" dirty="0"/>
+          </a:p>
+          <a:p>
+            <a:r>
+              <a:rPr lang="ja-JP" altLang="en-US" sz="2400" dirty="0"/>
+              <a:t>・説明書やチュートリアルを見ただけで遊べること</a:t>
+            </a:r>
+            <a:endParaRPr lang="en-US" altLang="ja-JP" sz="2400" dirty="0"/>
+          </a:p>
+          <a:p>
+            <a:r>
+              <a:rPr lang="ja-JP" altLang="en-US" sz="2400" dirty="0"/>
+              <a:t>・面白い仕組みが明確にあること</a:t>
+            </a:r>
+            <a:endParaRPr lang="en-US" altLang="ja-JP" sz="2400" dirty="0"/>
+          </a:p>
+          <a:p>
+            <a:r>
+              <a:rPr lang="ja-JP" altLang="en-US" sz="2400" dirty="0"/>
+              <a:t>・バグがないこと</a:t>
+            </a:r>
+            <a:endParaRPr lang="en-US" altLang="ja-JP" sz="2400" dirty="0"/>
+          </a:p>
+          <a:p>
+            <a:r>
+              <a:rPr lang="ja-JP" altLang="en-US" sz="2400" dirty="0"/>
+              <a:t>・ゲームとして必要なものが全てそろっていること</a:t>
+            </a:r>
+            <a:endParaRPr lang="en-US" altLang="ja-JP" sz="2400" dirty="0"/>
+          </a:p>
+          <a:p>
+            <a:r>
+              <a:rPr lang="ja-JP" altLang="en-US" sz="2400" dirty="0"/>
+              <a:t>　・各画面、</a:t>
+            </a:r>
+            <a:r>
+              <a:rPr lang="en-US" altLang="ja-JP" sz="2400" dirty="0"/>
+              <a:t>SE</a:t>
+            </a:r>
+            <a:r>
+              <a:rPr lang="ja-JP" altLang="en-US" sz="2400" dirty="0"/>
+              <a:t>、エフェクト、サウンドなど</a:t>
+            </a:r>
+            <a:endParaRPr lang="en-US" altLang="ja-JP" sz="2400" dirty="0"/>
+          </a:p>
+          <a:p>
+            <a:endParaRPr lang="en-US" altLang="ja-JP" sz="2400" dirty="0"/>
+          </a:p>
+          <a:p>
+            <a:r>
+              <a:rPr lang="ja-JP" altLang="en-US" sz="2400" b="1" dirty="0">
+                <a:solidFill>
+                  <a:srgbClr val="FF0000"/>
+                </a:solidFill>
+              </a:rPr>
+              <a:t>以下は許可しない例</a:t>
+            </a:r>
+            <a:endParaRPr lang="en-US" altLang="ja-JP" sz="2400" b="1" dirty="0">
+              <a:solidFill>
+                <a:srgbClr val="FF0000"/>
+              </a:solidFill>
+            </a:endParaRPr>
+          </a:p>
+          <a:p>
+            <a:r>
+              <a:rPr lang="ja-JP" altLang="en-US" sz="2400" dirty="0"/>
+              <a:t>・見た目だけよくて面白くないもの</a:t>
+            </a:r>
+            <a:endParaRPr lang="en-US" altLang="ja-JP" sz="2400" dirty="0"/>
+          </a:p>
+          <a:p>
+            <a:r>
+              <a:rPr lang="ja-JP" altLang="en-US" sz="2400" dirty="0"/>
+              <a:t>・ゲームプレイ部分はできていても、他画面の質が悪いもの</a:t>
+            </a:r>
+            <a:endParaRPr lang="en-US" altLang="ja-JP" sz="2400" dirty="0"/>
+          </a:p>
+          <a:p>
+            <a:r>
+              <a:rPr lang="ja-JP" altLang="en-US" sz="2400" dirty="0"/>
+              <a:t>・ボタン配置などで操作感が悪く遊びにくいもの</a:t>
             </a:r>
             <a:endParaRPr lang="en-US" altLang="ja-JP" sz="2400" dirty="0"/>
           </a:p>
@@ -4751,7 +5147,7 @@
     </p:spTree>
     <p:extLst>
       <p:ext uri="{BB962C8B-B14F-4D97-AF65-F5344CB8AC3E}">
-        <p14:creationId xmlns:p14="http://schemas.microsoft.com/office/powerpoint/2010/main" val="1282673672"/>
+        <p14:creationId xmlns:p14="http://schemas.microsoft.com/office/powerpoint/2010/main" val="1621185352"/>
       </p:ext>
     </p:extLst>
   </p:cSld>
@@ -4793,7 +5189,7 @@
         <p:spPr>
           <a:xfrm>
             <a:off x="567542" y="491954"/>
-            <a:ext cx="6046848" cy="584775"/>
+            <a:ext cx="4405373" cy="584775"/>
           </a:xfrm>
           <a:prstGeom prst="rect">
             <a:avLst/>
@@ -4808,7 +5204,7 @@
           <a:p>
             <a:r>
               <a:rPr kumimoji="1" lang="ja-JP" altLang="en-US" sz="3200" b="1" u="sng" dirty="0"/>
-              <a:t>学生ゲーム展示会 広告ポスター</a:t>
+              <a:t>学生ゲーム展示会 準備</a:t>
             </a:r>
           </a:p>
         </p:txBody>
@@ -4828,7 +5224,7 @@
         <p:spPr>
           <a:xfrm>
             <a:off x="567542" y="1216429"/>
-            <a:ext cx="7263527" cy="3785652"/>
+            <a:ext cx="6340197" cy="3416320"/>
           </a:xfrm>
           <a:prstGeom prst="rect">
             <a:avLst/>
@@ -4843,74 +5239,55 @@
           <a:p>
             <a:r>
               <a:rPr lang="ja-JP" altLang="en-US" sz="2400" dirty="0"/>
-              <a:t>学校に掲示したり、</a:t>
-            </a:r>
-            <a:endParaRPr lang="en-US" altLang="ja-JP" sz="2400" dirty="0"/>
-          </a:p>
-          <a:p>
-            <a:r>
-              <a:rPr lang="ja-JP" altLang="en-US" sz="2400" dirty="0"/>
-              <a:t>高校生や企業の方に配るポスターを作ります。</a:t>
-            </a:r>
-            <a:endParaRPr lang="en-US" altLang="ja-JP" sz="2400" dirty="0"/>
-          </a:p>
-          <a:p>
-            <a:r>
-              <a:rPr lang="ja-JP" altLang="en-US" sz="2400" dirty="0"/>
-              <a:t>作りたい方がいましたら教員までご連絡ください。</a:t>
-            </a:r>
-            <a:endParaRPr lang="en-US" altLang="ja-JP" sz="2400" dirty="0"/>
-          </a:p>
-          <a:p>
-            <a:endParaRPr lang="en-US" altLang="ja-JP" sz="2400" dirty="0"/>
-          </a:p>
-          <a:p>
-            <a:r>
-              <a:rPr lang="ja-JP" altLang="en-US" sz="2400" b="1" dirty="0">
-                <a:solidFill>
-                  <a:srgbClr val="FF0000"/>
-                </a:solidFill>
-              </a:rPr>
-              <a:t>■ポスター制作スケジュール</a:t>
-            </a:r>
-            <a:endParaRPr lang="en-US" altLang="ja-JP" sz="2400" b="1" dirty="0">
-              <a:solidFill>
-                <a:srgbClr val="FF0000"/>
-              </a:solidFill>
-            </a:endParaRPr>
-          </a:p>
-          <a:p>
-            <a:r>
-              <a:rPr lang="en-US" altLang="ja-JP" sz="2400" dirty="0"/>
-              <a:t>11/16</a:t>
-            </a:r>
-            <a:r>
-              <a:rPr lang="ja-JP" altLang="en-US" sz="2400" dirty="0"/>
-              <a:t>（金）　初案提出　</a:t>
-            </a:r>
-            <a:endParaRPr lang="en-US" altLang="ja-JP" sz="2400" dirty="0"/>
-          </a:p>
-          <a:p>
-            <a:endParaRPr lang="en-US" altLang="ja-JP" sz="2400" dirty="0"/>
-          </a:p>
-          <a:p>
-            <a:r>
-              <a:rPr lang="ja-JP" altLang="en-US" sz="2400" dirty="0"/>
-              <a:t>～修正期間～</a:t>
-            </a:r>
-            <a:endParaRPr lang="en-US" altLang="ja-JP" sz="2400" dirty="0"/>
-          </a:p>
-          <a:p>
-            <a:endParaRPr lang="en-US" altLang="ja-JP" sz="2400" dirty="0"/>
-          </a:p>
-          <a:p>
-            <a:r>
-              <a:rPr lang="en-US" altLang="ja-JP" sz="2400" dirty="0"/>
-              <a:t>11/23</a:t>
-            </a:r>
-            <a:r>
-              <a:rPr lang="ja-JP" altLang="en-US" sz="2400" dirty="0"/>
-              <a:t>（金）　完成</a:t>
+              <a:t>一大イベントなので準備もたくさんあります</a:t>
+            </a:r>
+            <a:endParaRPr lang="en-US" altLang="ja-JP" sz="2400" dirty="0"/>
+          </a:p>
+          <a:p>
+            <a:endParaRPr lang="en-US" altLang="ja-JP" sz="2400" dirty="0"/>
+          </a:p>
+          <a:p>
+            <a:r>
+              <a:rPr lang="ja-JP" altLang="en-US" sz="2400" dirty="0"/>
+              <a:t>・広告ポスター作り</a:t>
+            </a:r>
+            <a:endParaRPr lang="en-US" altLang="ja-JP" sz="2400" dirty="0"/>
+          </a:p>
+          <a:p>
+            <a:r>
+              <a:rPr lang="ja-JP" altLang="en-US" sz="2400" dirty="0"/>
+              <a:t>・経路案内づくり</a:t>
+            </a:r>
+            <a:endParaRPr lang="en-US" altLang="ja-JP" sz="2400" dirty="0"/>
+          </a:p>
+          <a:p>
+            <a:r>
+              <a:rPr lang="ja-JP" altLang="en-US" sz="2400" dirty="0"/>
+              <a:t>・飾り付け</a:t>
+            </a:r>
+            <a:endParaRPr lang="en-US" altLang="ja-JP" sz="2400" dirty="0"/>
+          </a:p>
+          <a:p>
+            <a:r>
+              <a:rPr lang="ja-JP" altLang="en-US" sz="2400" dirty="0"/>
+              <a:t>・ゲーム資料作り</a:t>
+            </a:r>
+            <a:endParaRPr lang="en-US" altLang="ja-JP" sz="2400" dirty="0"/>
+          </a:p>
+          <a:p>
+            <a:r>
+              <a:rPr lang="ja-JP" altLang="en-US" sz="2400" dirty="0"/>
+              <a:t>・展示作品動画作り</a:t>
+            </a:r>
+            <a:endParaRPr lang="en-US" altLang="ja-JP" sz="2400" dirty="0"/>
+          </a:p>
+          <a:p>
+            <a:endParaRPr lang="en-US" altLang="ja-JP" sz="2400" dirty="0"/>
+          </a:p>
+          <a:p>
+            <a:r>
+              <a:rPr lang="ja-JP" altLang="en-US" sz="2400" dirty="0"/>
+              <a:t>学生主体で準備しましょう。</a:t>
             </a:r>
             <a:endParaRPr lang="en-US" altLang="ja-JP" sz="2400" dirty="0"/>
           </a:p>
@@ -4919,7 +5296,7 @@
     </p:spTree>
     <p:extLst>
       <p:ext uri="{BB962C8B-B14F-4D97-AF65-F5344CB8AC3E}">
-        <p14:creationId xmlns:p14="http://schemas.microsoft.com/office/powerpoint/2010/main" val="3090831239"/>
+        <p14:creationId xmlns:p14="http://schemas.microsoft.com/office/powerpoint/2010/main" val="1282673672"/>
       </p:ext>
     </p:extLst>
   </p:cSld>
@@ -4961,7 +5338,7 @@
         <p:spPr>
           <a:xfrm>
             <a:off x="567542" y="491954"/>
-            <a:ext cx="5636479" cy="584775"/>
+            <a:ext cx="6046848" cy="584775"/>
           </a:xfrm>
           <a:prstGeom prst="rect">
             <a:avLst/>
@@ -4976,7 +5353,7 @@
           <a:p>
             <a:r>
               <a:rPr kumimoji="1" lang="ja-JP" altLang="en-US" sz="3200" b="1" u="sng" dirty="0"/>
-              <a:t>学生ゲーム展示会 当日の動き</a:t>
+              <a:t>学生ゲーム展示会 広告ポスター</a:t>
             </a:r>
           </a:p>
         </p:txBody>
@@ -4996,7 +5373,7 @@
         <p:spPr>
           <a:xfrm>
             <a:off x="567542" y="1216429"/>
-            <a:ext cx="9110186" cy="3785652"/>
+            <a:ext cx="7263527" cy="3785652"/>
           </a:xfrm>
           <a:prstGeom prst="rect">
             <a:avLst/>
@@ -5011,7 +5388,21 @@
           <a:p>
             <a:r>
               <a:rPr lang="ja-JP" altLang="en-US" sz="2400" dirty="0"/>
-              <a:t>当日は展示する学生としない学生で、役割分担して運営します。</a:t>
+              <a:t>学校に掲示したり、</a:t>
+            </a:r>
+            <a:endParaRPr lang="en-US" altLang="ja-JP" sz="2400" dirty="0"/>
+          </a:p>
+          <a:p>
+            <a:r>
+              <a:rPr lang="ja-JP" altLang="en-US" sz="2400" dirty="0"/>
+              <a:t>高校生や企業の方に配るポスターを作ります。</a:t>
+            </a:r>
+            <a:endParaRPr lang="en-US" altLang="ja-JP" sz="2400" dirty="0"/>
+          </a:p>
+          <a:p>
+            <a:r>
+              <a:rPr lang="ja-JP" altLang="en-US" sz="2400" dirty="0"/>
+              <a:t>作りたい方がいましたら教員までご連絡ください。</a:t>
             </a:r>
             <a:endParaRPr lang="en-US" altLang="ja-JP" sz="2400" dirty="0"/>
           </a:p>
@@ -5025,7 +5416,7 @@
                   <a:srgbClr val="FF0000"/>
                 </a:solidFill>
               </a:rPr>
-              <a:t>■展示する学生</a:t>
+              <a:t>■ポスター制作スケジュール</a:t>
             </a:r>
             <a:endParaRPr lang="en-US" altLang="ja-JP" sz="2400" b="1" dirty="0">
               <a:solidFill>
@@ -5035,54 +5426,36 @@
           </a:p>
           <a:p>
             <a:r>
-              <a:rPr lang="ja-JP" altLang="en-US" sz="2400" dirty="0"/>
-              <a:t>・展示ブースでの対応</a:t>
-            </a:r>
-            <a:endParaRPr lang="en-US" altLang="ja-JP" sz="2400" dirty="0"/>
-          </a:p>
-          <a:p>
-            <a:r>
-              <a:rPr lang="ja-JP" altLang="en-US" sz="2400" dirty="0"/>
-              <a:t>・採用ブースに招待された時の対応</a:t>
-            </a:r>
-            <a:endParaRPr lang="en-US" altLang="ja-JP" sz="2400" dirty="0"/>
-          </a:p>
-          <a:p>
-            <a:endParaRPr lang="en-US" altLang="ja-JP" sz="2400" dirty="0"/>
-          </a:p>
-          <a:p>
-            <a:r>
-              <a:rPr lang="ja-JP" altLang="en-US" sz="2400" b="1" dirty="0">
-                <a:solidFill>
-                  <a:srgbClr val="FF0000"/>
-                </a:solidFill>
-              </a:rPr>
-              <a:t>■展示しない学生</a:t>
-            </a:r>
-            <a:endParaRPr lang="en-US" altLang="ja-JP" sz="2400" b="1" dirty="0">
-              <a:solidFill>
-                <a:srgbClr val="FF0000"/>
-              </a:solidFill>
-            </a:endParaRPr>
-          </a:p>
-          <a:p>
-            <a:r>
-              <a:rPr lang="ja-JP" altLang="en-US" sz="2400" dirty="0"/>
-              <a:t>・案内係</a:t>
-            </a:r>
-            <a:endParaRPr lang="en-US" altLang="ja-JP" sz="2400" dirty="0"/>
-          </a:p>
-          <a:p>
-            <a:r>
-              <a:rPr lang="ja-JP" altLang="en-US" sz="2400" dirty="0"/>
-              <a:t>・受付係</a:t>
-            </a:r>
-            <a:endParaRPr lang="en-US" altLang="ja-JP" sz="2400" dirty="0"/>
-          </a:p>
-          <a:p>
-            <a:r>
-              <a:rPr lang="ja-JP" altLang="en-US" sz="2400" dirty="0"/>
-              <a:t>・展示ブースのアシスタント</a:t>
+              <a:rPr lang="en-US" altLang="ja-JP" sz="2400" dirty="0"/>
+              <a:t>11/16</a:t>
+            </a:r>
+            <a:r>
+              <a:rPr lang="ja-JP" altLang="en-US" sz="2400" dirty="0"/>
+              <a:t>（金）　初案提出　</a:t>
+            </a:r>
+            <a:endParaRPr lang="en-US" altLang="ja-JP" sz="2400" dirty="0"/>
+          </a:p>
+          <a:p>
+            <a:endParaRPr lang="en-US" altLang="ja-JP" sz="2400" dirty="0"/>
+          </a:p>
+          <a:p>
+            <a:r>
+              <a:rPr lang="ja-JP" altLang="en-US" sz="2400" dirty="0"/>
+              <a:t>～修正期間～</a:t>
+            </a:r>
+            <a:endParaRPr lang="en-US" altLang="ja-JP" sz="2400" dirty="0"/>
+          </a:p>
+          <a:p>
+            <a:endParaRPr lang="en-US" altLang="ja-JP" sz="2400" dirty="0"/>
+          </a:p>
+          <a:p>
+            <a:r>
+              <a:rPr lang="en-US" altLang="ja-JP" sz="2400" dirty="0"/>
+              <a:t>11/23</a:t>
+            </a:r>
+            <a:r>
+              <a:rPr lang="ja-JP" altLang="en-US" sz="2400" dirty="0"/>
+              <a:t>（金）　完成</a:t>
             </a:r>
             <a:endParaRPr lang="en-US" altLang="ja-JP" sz="2400" dirty="0"/>
           </a:p>
@@ -5091,7 +5464,7 @@
     </p:spTree>
     <p:extLst>
       <p:ext uri="{BB962C8B-B14F-4D97-AF65-F5344CB8AC3E}">
-        <p14:creationId xmlns:p14="http://schemas.microsoft.com/office/powerpoint/2010/main" val="3528189176"/>
+        <p14:creationId xmlns:p14="http://schemas.microsoft.com/office/powerpoint/2010/main" val="3090831239"/>
       </p:ext>
     </p:extLst>
   </p:cSld>
@@ -5168,7 +5541,7 @@
         <p:spPr>
           <a:xfrm>
             <a:off x="567542" y="1216429"/>
-            <a:ext cx="9417963" cy="4893647"/>
+            <a:ext cx="9110186" cy="3785652"/>
           </a:xfrm>
           <a:prstGeom prst="rect">
             <a:avLst/>
@@ -5183,7 +5556,7 @@
           <a:p>
             <a:r>
               <a:rPr lang="ja-JP" altLang="en-US" sz="2400" dirty="0"/>
-              <a:t>それぞれの係の役割です</a:t>
+              <a:t>当日は展示する学生としない学生で、役割分担して運営します。</a:t>
             </a:r>
             <a:endParaRPr lang="en-US" altLang="ja-JP" sz="2400" dirty="0"/>
           </a:p>
@@ -5197,7 +5570,7 @@
                   <a:srgbClr val="FF0000"/>
                 </a:solidFill>
               </a:rPr>
-              <a:t>■案内係</a:t>
+              <a:t>■展示する学生</a:t>
             </a:r>
             <a:endParaRPr lang="en-US" altLang="ja-JP" sz="2400" b="1" dirty="0">
               <a:solidFill>
@@ -5208,15 +5581,14 @@
           <a:p>
             <a:r>
               <a:rPr lang="ja-JP" altLang="en-US" sz="2400" dirty="0"/>
-              <a:t>学校まで来られた方を</a:t>
-            </a:r>
-            <a:r>
-              <a:rPr lang="en-US" altLang="ja-JP" sz="2400" dirty="0"/>
-              <a:t>6</a:t>
-            </a:r>
-            <a:r>
-              <a:rPr lang="ja-JP" altLang="en-US" sz="2400" dirty="0"/>
-              <a:t>階の受付まで案内する係</a:t>
+              <a:t>・展示ブースでの対応</a:t>
+            </a:r>
+            <a:endParaRPr lang="en-US" altLang="ja-JP" sz="2400" dirty="0"/>
+          </a:p>
+          <a:p>
+            <a:r>
+              <a:rPr lang="ja-JP" altLang="en-US" sz="2400" dirty="0"/>
+              <a:t>・採用ブースに招待された時の対応</a:t>
             </a:r>
             <a:endParaRPr lang="en-US" altLang="ja-JP" sz="2400" dirty="0"/>
           </a:p>
@@ -5230,7 +5602,7 @@
                   <a:srgbClr val="FF0000"/>
                 </a:solidFill>
               </a:rPr>
-              <a:t>■受付係</a:t>
+              <a:t>■展示しない学生</a:t>
             </a:r>
             <a:endParaRPr lang="en-US" altLang="ja-JP" sz="2400" b="1" dirty="0">
               <a:solidFill>
@@ -5241,53 +5613,21 @@
           <a:p>
             <a:r>
               <a:rPr lang="ja-JP" altLang="en-US" sz="2400" dirty="0"/>
-              <a:t>企業、保護者、在校生、高校生ごとに記載事項を記載してもらい、</a:t>
-            </a:r>
-            <a:endParaRPr lang="en-US" altLang="ja-JP" sz="2400" dirty="0"/>
-          </a:p>
-          <a:p>
-            <a:r>
-              <a:rPr lang="ja-JP" altLang="en-US" sz="2400" dirty="0"/>
-              <a:t>アンケートを渡した後に会場について説明する係</a:t>
-            </a:r>
-            <a:endParaRPr lang="en-US" altLang="ja-JP" sz="2400" dirty="0"/>
-          </a:p>
-          <a:p>
-            <a:r>
-              <a:rPr lang="ja-JP" altLang="en-US" sz="2400" dirty="0"/>
-              <a:t>企業の場合は名刺の受け取りもする。</a:t>
-            </a:r>
-            <a:endParaRPr lang="en-US" altLang="ja-JP" sz="2400" dirty="0"/>
-          </a:p>
-          <a:p>
-            <a:endParaRPr lang="en-US" altLang="ja-JP" sz="2400" dirty="0"/>
-          </a:p>
-          <a:p>
-            <a:r>
-              <a:rPr lang="ja-JP" altLang="en-US" sz="2400" b="1" dirty="0">
-                <a:solidFill>
-                  <a:srgbClr val="FF0000"/>
-                </a:solidFill>
-              </a:rPr>
-              <a:t>■展示ブースのアシスタント</a:t>
-            </a:r>
-            <a:endParaRPr lang="en-US" altLang="ja-JP" sz="2400" b="1" dirty="0">
-              <a:solidFill>
-                <a:srgbClr val="FF0000"/>
-              </a:solidFill>
-            </a:endParaRPr>
-          </a:p>
-          <a:p>
-            <a:r>
-              <a:rPr lang="ja-JP" altLang="en-US" sz="2400" dirty="0"/>
-              <a:t>展示してる人が休憩しているときに代わりに対応する係。</a:t>
-            </a:r>
-            <a:endParaRPr lang="en-US" altLang="ja-JP" sz="2400" dirty="0"/>
-          </a:p>
-          <a:p>
-            <a:r>
-              <a:rPr lang="ja-JP" altLang="en-US" sz="2400" dirty="0"/>
-              <a:t>会場が混雑しているときの整理も兼用。</a:t>
+              <a:t>・案内係</a:t>
+            </a:r>
+            <a:endParaRPr lang="en-US" altLang="ja-JP" sz="2400" dirty="0"/>
+          </a:p>
+          <a:p>
+            <a:r>
+              <a:rPr lang="ja-JP" altLang="en-US" sz="2400" dirty="0"/>
+              <a:t>・受付係</a:t>
+            </a:r>
+            <a:endParaRPr lang="en-US" altLang="ja-JP" sz="2400" dirty="0"/>
+          </a:p>
+          <a:p>
+            <a:r>
+              <a:rPr lang="ja-JP" altLang="en-US" sz="2400" dirty="0"/>
+              <a:t>・展示ブースのアシスタント</a:t>
             </a:r>
             <a:endParaRPr lang="en-US" altLang="ja-JP" sz="2400" dirty="0"/>
           </a:p>
@@ -5296,7 +5636,7 @@
     </p:spTree>
     <p:extLst>
       <p:ext uri="{BB962C8B-B14F-4D97-AF65-F5344CB8AC3E}">
-        <p14:creationId xmlns:p14="http://schemas.microsoft.com/office/powerpoint/2010/main" val="829780203"/>
+        <p14:creationId xmlns:p14="http://schemas.microsoft.com/office/powerpoint/2010/main" val="3528189176"/>
       </p:ext>
     </p:extLst>
   </p:cSld>
